--- a/docs/presentation/lerree-lab-final.pptx
+++ b/docs/presentation/lerree-lab-final.pptx
@@ -10456,7 +10456,7 @@
                   <a:schemeClr val="tx1"/>
                 </a:solidFill>
               </a:rPr>
-              <a:t>Git: 32 коммита + 5 репо этапов</a:t>
+              <a:t>Git: 30+ коммитов + 5 репо этапов</a:t>
             </a:r>
             <a:endParaRPr lang="en-US" sz="1400" dirty="0"/>
           </a:p>
